--- a/workspace/test_brand_proj/runs/test_brand_run/output.pptx
+++ b/workspace/test_brand_proj/runs/test_brand_run/output.pptx
@@ -3300,8 +3300,8 @@
         </p:nvSpPr>
         <p:spPr>
           <a:xfrm>
-            <a:off x="256032" y="960120"/>
-            <a:ext cx="8631936" cy="3703320"/>
+            <a:off x="256032" y="868680"/>
+            <a:ext cx="8631936" cy="4114800"/>
           </a:xfrm>
           <a:prstGeom prst="rect">
             <a:avLst/>
@@ -3314,15 +3314,11 @@
           </a:bodyPr>
           <a:lstStyle/>
           <a:p>
-            <a:pPr algn="l">
-              <a:spcAft>
-                <a:spcPts val="1400"/>
-              </a:spcAft>
-            </a:pPr>
+            <a:pPr algn="l"/>
             <a:r>
               <a:rPr sz="1600">
                 <a:solidFill>
-                  <a:srgbClr val="3D3D3D"/>
+                  <a:srgbClr val="1A1A1A"/>
                 </a:solidFill>
                 <a:latin typeface="Calibri"/>
               </a:rPr>
@@ -3542,8 +3538,8 @@
         </p:nvSpPr>
         <p:spPr>
           <a:xfrm>
-            <a:off x="256032" y="960120"/>
-            <a:ext cx="8631936" cy="3703320"/>
+            <a:off x="256032" y="868680"/>
+            <a:ext cx="8631936" cy="4114800"/>
           </a:xfrm>
           <a:prstGeom prst="rect">
             <a:avLst/>
@@ -3556,15 +3552,11 @@
           </a:bodyPr>
           <a:lstStyle/>
           <a:p>
-            <a:pPr algn="l">
-              <a:spcAft>
-                <a:spcPts val="1400"/>
-              </a:spcAft>
-            </a:pPr>
+            <a:pPr algn="l"/>
             <a:r>
               <a:rPr sz="1600">
                 <a:solidFill>
-                  <a:srgbClr val="3D3D3D"/>
+                  <a:srgbClr val="1A1A1A"/>
                 </a:solidFill>
                 <a:latin typeface="Calibri"/>
               </a:rPr>
@@ -3784,8 +3776,8 @@
         </p:nvSpPr>
         <p:spPr>
           <a:xfrm>
-            <a:off x="256032" y="960120"/>
-            <a:ext cx="8631936" cy="3703320"/>
+            <a:off x="256032" y="868680"/>
+            <a:ext cx="8631936" cy="4114800"/>
           </a:xfrm>
           <a:prstGeom prst="rect">
             <a:avLst/>
@@ -3798,15 +3790,11 @@
           </a:bodyPr>
           <a:lstStyle/>
           <a:p>
-            <a:pPr algn="l">
-              <a:spcAft>
-                <a:spcPts val="1400"/>
-              </a:spcAft>
-            </a:pPr>
+            <a:pPr algn="l"/>
             <a:r>
               <a:rPr sz="1600">
                 <a:solidFill>
-                  <a:srgbClr val="3D3D3D"/>
+                  <a:srgbClr val="1A1A1A"/>
                 </a:solidFill>
                 <a:latin typeface="Calibri"/>
               </a:rPr>
@@ -4026,8 +4014,8 @@
         </p:nvSpPr>
         <p:spPr>
           <a:xfrm>
-            <a:off x="256032" y="960120"/>
-            <a:ext cx="8631936" cy="3703320"/>
+            <a:off x="256032" y="868680"/>
+            <a:ext cx="8631936" cy="4114800"/>
           </a:xfrm>
           <a:prstGeom prst="rect">
             <a:avLst/>
@@ -4040,15 +4028,11 @@
           </a:bodyPr>
           <a:lstStyle/>
           <a:p>
-            <a:pPr algn="l">
-              <a:spcAft>
-                <a:spcPts val="1400"/>
-              </a:spcAft>
-            </a:pPr>
+            <a:pPr algn="l"/>
             <a:r>
               <a:rPr sz="1600">
                 <a:solidFill>
-                  <a:srgbClr val="3D3D3D"/>
+                  <a:srgbClr val="1A1A1A"/>
                 </a:solidFill>
                 <a:latin typeface="Calibri"/>
               </a:rPr>
@@ -4268,8 +4252,8 @@
         </p:nvSpPr>
         <p:spPr>
           <a:xfrm>
-            <a:off x="256032" y="960120"/>
-            <a:ext cx="8631936" cy="3703320"/>
+            <a:off x="256032" y="868680"/>
+            <a:ext cx="8631936" cy="4114800"/>
           </a:xfrm>
           <a:prstGeom prst="rect">
             <a:avLst/>
@@ -4282,15 +4266,11 @@
           </a:bodyPr>
           <a:lstStyle/>
           <a:p>
-            <a:pPr algn="l">
-              <a:spcAft>
-                <a:spcPts val="1400"/>
-              </a:spcAft>
-            </a:pPr>
+            <a:pPr algn="l"/>
             <a:r>
               <a:rPr sz="1600">
                 <a:solidFill>
-                  <a:srgbClr val="3D3D3D"/>
+                  <a:srgbClr val="1A1A1A"/>
                 </a:solidFill>
                 <a:latin typeface="Calibri"/>
               </a:rPr>
@@ -4510,8 +4490,8 @@
         </p:nvSpPr>
         <p:spPr>
           <a:xfrm>
-            <a:off x="256032" y="960120"/>
-            <a:ext cx="8631936" cy="3703320"/>
+            <a:off x="256032" y="868680"/>
+            <a:ext cx="8631936" cy="4114800"/>
           </a:xfrm>
           <a:prstGeom prst="rect">
             <a:avLst/>
@@ -4524,15 +4504,11 @@
           </a:bodyPr>
           <a:lstStyle/>
           <a:p>
-            <a:pPr algn="l">
-              <a:spcAft>
-                <a:spcPts val="1400"/>
-              </a:spcAft>
-            </a:pPr>
+            <a:pPr algn="l"/>
             <a:r>
               <a:rPr sz="1600">
                 <a:solidFill>
-                  <a:srgbClr val="3D3D3D"/>
+                  <a:srgbClr val="1A1A1A"/>
                 </a:solidFill>
                 <a:latin typeface="Calibri"/>
               </a:rPr>
@@ -4752,8 +4728,8 @@
         </p:nvSpPr>
         <p:spPr>
           <a:xfrm>
-            <a:off x="256032" y="960120"/>
-            <a:ext cx="8631936" cy="3703320"/>
+            <a:off x="256032" y="868680"/>
+            <a:ext cx="8631936" cy="4114800"/>
           </a:xfrm>
           <a:prstGeom prst="rect">
             <a:avLst/>
@@ -4766,15 +4742,11 @@
           </a:bodyPr>
           <a:lstStyle/>
           <a:p>
-            <a:pPr algn="l">
-              <a:spcAft>
-                <a:spcPts val="1400"/>
-              </a:spcAft>
-            </a:pPr>
+            <a:pPr algn="l"/>
             <a:r>
               <a:rPr sz="1600">
                 <a:solidFill>
-                  <a:srgbClr val="3D3D3D"/>
+                  <a:srgbClr val="1A1A1A"/>
                 </a:solidFill>
                 <a:latin typeface="Calibri"/>
               </a:rPr>
@@ -4994,8 +4966,8 @@
         </p:nvSpPr>
         <p:spPr>
           <a:xfrm>
-            <a:off x="256032" y="960120"/>
-            <a:ext cx="8631936" cy="3703320"/>
+            <a:off x="256032" y="868680"/>
+            <a:ext cx="8631936" cy="4114800"/>
           </a:xfrm>
           <a:prstGeom prst="rect">
             <a:avLst/>
@@ -5008,15 +4980,11 @@
           </a:bodyPr>
           <a:lstStyle/>
           <a:p>
-            <a:pPr algn="l">
-              <a:spcAft>
-                <a:spcPts val="1400"/>
-              </a:spcAft>
-            </a:pPr>
+            <a:pPr algn="l"/>
             <a:r>
               <a:rPr sz="1600">
                 <a:solidFill>
-                  <a:srgbClr val="3D3D3D"/>
+                  <a:srgbClr val="1A1A1A"/>
                 </a:solidFill>
                 <a:latin typeface="Calibri"/>
               </a:rPr>
@@ -5236,8 +5204,8 @@
         </p:nvSpPr>
         <p:spPr>
           <a:xfrm>
-            <a:off x="256032" y="960120"/>
-            <a:ext cx="8631936" cy="3703320"/>
+            <a:off x="256032" y="868680"/>
+            <a:ext cx="8631936" cy="4114800"/>
           </a:xfrm>
           <a:prstGeom prst="rect">
             <a:avLst/>
@@ -5250,15 +5218,11 @@
           </a:bodyPr>
           <a:lstStyle/>
           <a:p>
-            <a:pPr algn="l">
-              <a:spcAft>
-                <a:spcPts val="1400"/>
-              </a:spcAft>
-            </a:pPr>
+            <a:pPr algn="l"/>
             <a:r>
               <a:rPr sz="1600">
                 <a:solidFill>
-                  <a:srgbClr val="3D3D3D"/>
+                  <a:srgbClr val="1A1A1A"/>
                 </a:solidFill>
                 <a:latin typeface="Calibri"/>
               </a:rPr>
@@ -5478,8 +5442,8 @@
         </p:nvSpPr>
         <p:spPr>
           <a:xfrm>
-            <a:off x="256032" y="960120"/>
-            <a:ext cx="8631936" cy="3703320"/>
+            <a:off x="256032" y="868680"/>
+            <a:ext cx="8631936" cy="4114800"/>
           </a:xfrm>
           <a:prstGeom prst="rect">
             <a:avLst/>
@@ -5492,15 +5456,11 @@
           </a:bodyPr>
           <a:lstStyle/>
           <a:p>
-            <a:pPr algn="l">
-              <a:spcAft>
-                <a:spcPts val="1400"/>
-              </a:spcAft>
-            </a:pPr>
+            <a:pPr algn="l"/>
             <a:r>
               <a:rPr sz="1600">
                 <a:solidFill>
-                  <a:srgbClr val="3D3D3D"/>
+                  <a:srgbClr val="1A1A1A"/>
                 </a:solidFill>
                 <a:latin typeface="Calibri"/>
               </a:rPr>
@@ -5720,8 +5680,8 @@
         </p:nvSpPr>
         <p:spPr>
           <a:xfrm>
-            <a:off x="256032" y="960120"/>
-            <a:ext cx="8631936" cy="3703320"/>
+            <a:off x="256032" y="868680"/>
+            <a:ext cx="8631936" cy="4114800"/>
           </a:xfrm>
           <a:prstGeom prst="rect">
             <a:avLst/>
@@ -5734,15 +5694,11 @@
           </a:bodyPr>
           <a:lstStyle/>
           <a:p>
-            <a:pPr algn="l">
-              <a:spcAft>
-                <a:spcPts val="1400"/>
-              </a:spcAft>
-            </a:pPr>
+            <a:pPr algn="l"/>
             <a:r>
               <a:rPr sz="1600">
                 <a:solidFill>
-                  <a:srgbClr val="3D3D3D"/>
+                  <a:srgbClr val="1A1A1A"/>
                 </a:solidFill>
                 <a:latin typeface="Calibri"/>
               </a:rPr>
@@ -5962,8 +5918,8 @@
         </p:nvSpPr>
         <p:spPr>
           <a:xfrm>
-            <a:off x="256032" y="960120"/>
-            <a:ext cx="8631936" cy="3703320"/>
+            <a:off x="256032" y="868680"/>
+            <a:ext cx="8631936" cy="4114800"/>
           </a:xfrm>
           <a:prstGeom prst="rect">
             <a:avLst/>
@@ -5976,15 +5932,11 @@
           </a:bodyPr>
           <a:lstStyle/>
           <a:p>
-            <a:pPr algn="l">
-              <a:spcAft>
-                <a:spcPts val="1400"/>
-              </a:spcAft>
-            </a:pPr>
+            <a:pPr algn="l"/>
             <a:r>
               <a:rPr sz="1600">
                 <a:solidFill>
-                  <a:srgbClr val="3D3D3D"/>
+                  <a:srgbClr val="1A1A1A"/>
                 </a:solidFill>
                 <a:latin typeface="Calibri"/>
               </a:rPr>
@@ -6204,8 +6156,8 @@
         </p:nvSpPr>
         <p:spPr>
           <a:xfrm>
-            <a:off x="256032" y="960120"/>
-            <a:ext cx="8631936" cy="3703320"/>
+            <a:off x="256032" y="868680"/>
+            <a:ext cx="8631936" cy="4114800"/>
           </a:xfrm>
           <a:prstGeom prst="rect">
             <a:avLst/>
@@ -6218,15 +6170,11 @@
           </a:bodyPr>
           <a:lstStyle/>
           <a:p>
-            <a:pPr algn="l">
-              <a:spcAft>
-                <a:spcPts val="1400"/>
-              </a:spcAft>
-            </a:pPr>
+            <a:pPr algn="l"/>
             <a:r>
               <a:rPr sz="1600">
                 <a:solidFill>
-                  <a:srgbClr val="3D3D3D"/>
+                  <a:srgbClr val="1A1A1A"/>
                 </a:solidFill>
                 <a:latin typeface="Calibri"/>
               </a:rPr>
@@ -6446,8 +6394,8 @@
         </p:nvSpPr>
         <p:spPr>
           <a:xfrm>
-            <a:off x="256032" y="960120"/>
-            <a:ext cx="8631936" cy="3703320"/>
+            <a:off x="256032" y="868680"/>
+            <a:ext cx="8631936" cy="4114800"/>
           </a:xfrm>
           <a:prstGeom prst="rect">
             <a:avLst/>
@@ -6460,15 +6408,11 @@
           </a:bodyPr>
           <a:lstStyle/>
           <a:p>
-            <a:pPr algn="l">
-              <a:spcAft>
-                <a:spcPts val="1400"/>
-              </a:spcAft>
-            </a:pPr>
+            <a:pPr algn="l"/>
             <a:r>
               <a:rPr sz="1600">
                 <a:solidFill>
-                  <a:srgbClr val="3D3D3D"/>
+                  <a:srgbClr val="1A1A1A"/>
                 </a:solidFill>
                 <a:latin typeface="Calibri"/>
               </a:rPr>
@@ -6688,8 +6632,8 @@
         </p:nvSpPr>
         <p:spPr>
           <a:xfrm>
-            <a:off x="256032" y="960120"/>
-            <a:ext cx="8631936" cy="3703320"/>
+            <a:off x="256032" y="868680"/>
+            <a:ext cx="8631936" cy="4114800"/>
           </a:xfrm>
           <a:prstGeom prst="rect">
             <a:avLst/>
@@ -6702,15 +6646,11 @@
           </a:bodyPr>
           <a:lstStyle/>
           <a:p>
-            <a:pPr algn="l">
-              <a:spcAft>
-                <a:spcPts val="1400"/>
-              </a:spcAft>
-            </a:pPr>
+            <a:pPr algn="l"/>
             <a:r>
               <a:rPr sz="1600">
                 <a:solidFill>
-                  <a:srgbClr val="3D3D3D"/>
+                  <a:srgbClr val="1A1A1A"/>
                 </a:solidFill>
                 <a:latin typeface="Calibri"/>
               </a:rPr>
@@ -6930,8 +6870,8 @@
         </p:nvSpPr>
         <p:spPr>
           <a:xfrm>
-            <a:off x="256032" y="960120"/>
-            <a:ext cx="8631936" cy="3703320"/>
+            <a:off x="256032" y="868680"/>
+            <a:ext cx="8631936" cy="4114800"/>
           </a:xfrm>
           <a:prstGeom prst="rect">
             <a:avLst/>
@@ -6944,15 +6884,11 @@
           </a:bodyPr>
           <a:lstStyle/>
           <a:p>
-            <a:pPr algn="l">
-              <a:spcAft>
-                <a:spcPts val="1400"/>
-              </a:spcAft>
-            </a:pPr>
+            <a:pPr algn="l"/>
             <a:r>
               <a:rPr sz="1600">
                 <a:solidFill>
-                  <a:srgbClr val="3D3D3D"/>
+                  <a:srgbClr val="1A1A1A"/>
                 </a:solidFill>
                 <a:latin typeface="Calibri"/>
               </a:rPr>
@@ -7172,8 +7108,8 @@
         </p:nvSpPr>
         <p:spPr>
           <a:xfrm>
-            <a:off x="256032" y="960120"/>
-            <a:ext cx="8631936" cy="3703320"/>
+            <a:off x="256032" y="868680"/>
+            <a:ext cx="8631936" cy="4114800"/>
           </a:xfrm>
           <a:prstGeom prst="rect">
             <a:avLst/>
@@ -7186,15 +7122,11 @@
           </a:bodyPr>
           <a:lstStyle/>
           <a:p>
-            <a:pPr algn="l">
-              <a:spcAft>
-                <a:spcPts val="1400"/>
-              </a:spcAft>
-            </a:pPr>
+            <a:pPr algn="l"/>
             <a:r>
               <a:rPr sz="1600">
                 <a:solidFill>
-                  <a:srgbClr val="3D3D3D"/>
+                  <a:srgbClr val="1A1A1A"/>
                 </a:solidFill>
                 <a:latin typeface="Calibri"/>
               </a:rPr>
@@ -7414,8 +7346,8 @@
         </p:nvSpPr>
         <p:spPr>
           <a:xfrm>
-            <a:off x="256032" y="960120"/>
-            <a:ext cx="8631936" cy="3703320"/>
+            <a:off x="256032" y="868680"/>
+            <a:ext cx="8631936" cy="4114800"/>
           </a:xfrm>
           <a:prstGeom prst="rect">
             <a:avLst/>
@@ -7428,15 +7360,11 @@
           </a:bodyPr>
           <a:lstStyle/>
           <a:p>
-            <a:pPr algn="l">
-              <a:spcAft>
-                <a:spcPts val="1400"/>
-              </a:spcAft>
-            </a:pPr>
+            <a:pPr algn="l"/>
             <a:r>
               <a:rPr sz="1600">
                 <a:solidFill>
-                  <a:srgbClr val="3D3D3D"/>
+                  <a:srgbClr val="1A1A1A"/>
                 </a:solidFill>
                 <a:latin typeface="Calibri"/>
               </a:rPr>
@@ -7656,8 +7584,8 @@
         </p:nvSpPr>
         <p:spPr>
           <a:xfrm>
-            <a:off x="256032" y="960120"/>
-            <a:ext cx="8631936" cy="3703320"/>
+            <a:off x="256032" y="868680"/>
+            <a:ext cx="8631936" cy="4114800"/>
           </a:xfrm>
           <a:prstGeom prst="rect">
             <a:avLst/>
@@ -7670,15 +7598,11 @@
           </a:bodyPr>
           <a:lstStyle/>
           <a:p>
-            <a:pPr algn="l">
-              <a:spcAft>
-                <a:spcPts val="1400"/>
-              </a:spcAft>
-            </a:pPr>
+            <a:pPr algn="l"/>
             <a:r>
               <a:rPr sz="1600">
                 <a:solidFill>
-                  <a:srgbClr val="3D3D3D"/>
+                  <a:srgbClr val="1A1A1A"/>
                 </a:solidFill>
                 <a:latin typeface="Calibri"/>
               </a:rPr>
@@ -7898,8 +7822,8 @@
         </p:nvSpPr>
         <p:spPr>
           <a:xfrm>
-            <a:off x="256032" y="960120"/>
-            <a:ext cx="8631936" cy="3703320"/>
+            <a:off x="256032" y="868680"/>
+            <a:ext cx="8631936" cy="4114800"/>
           </a:xfrm>
           <a:prstGeom prst="rect">
             <a:avLst/>
@@ -7912,15 +7836,11 @@
           </a:bodyPr>
           <a:lstStyle/>
           <a:p>
-            <a:pPr algn="l">
-              <a:spcAft>
-                <a:spcPts val="1400"/>
-              </a:spcAft>
-            </a:pPr>
+            <a:pPr algn="l"/>
             <a:r>
               <a:rPr sz="1600">
                 <a:solidFill>
-                  <a:srgbClr val="3D3D3D"/>
+                  <a:srgbClr val="1A1A1A"/>
                 </a:solidFill>
                 <a:latin typeface="Calibri"/>
               </a:rPr>
